--- a/e2e/fixtures/ole-editable.pptx
+++ b/e2e/fixtures/ole-editable.pptx
@@ -3630,6 +3630,69 @@
                       <a:xfrm>
                         <a:off x="6350000" y="254000"/>
                         <a:ext cx="1143000" cy="889000"/>
+                      </a:xfrm>
+                      <a:prstGeom prst="rect">
+                        <a:avLst/>
+                      </a:prstGeom>
+                    </p:spPr>
+                  </p:pic>
+                </p:oleObj>
+              </mc:Fallback>
+            </mc:AlternateContent>
+          </a:graphicData>
+        </a:graphic>
+      </p:graphicFrame>
+      <p:graphicFrame>
+        <p:nvGraphicFramePr>
+          <p:cNvPr id="7" name="Embedded Legacy Doc">
+            <a:extLst>
+              <a:ext uri="{FF2B5EF4-FFF2-40B4-BE49-F238E27FC236}">
+                <a16:creationId xmlns:a16="http://schemas.microsoft.com/office/drawing/2014/main" id="{483E84E5-D31A-88B5-1251-2BC0DE554165}"/>
+              </a:ext>
+            </a:extLst>
+          </p:cNvPr>
+          <p:cNvGraphicFramePr>
+            <a:graphicFrameLocks noChangeAspect="1"/>
+          </p:cNvGraphicFramePr>
+          <p:nvPr>
+            <p:extLst>
+              <p:ext uri="{D42A27DB-BD31-4B8C-83A1-F6EECF244321}">
+                <p14:modId xmlns:p14="http://schemas.microsoft.com/office/powerpoint/2010/main" val="3072040661"/>
+              </p:ext>
+            </p:extLst>
+          </p:nvPr>
+        </p:nvGraphicFramePr>
+        <p:xfrm>
+          <a:off x="7620000" y="254000"/>
+          <a:ext cx="3302000" cy="2032000"/>
+        </p:xfrm>
+        <a:graphic>
+          <a:graphicData uri="http://schemas.openxmlformats.org/presentationml/2006/ole">
+            <mc:AlternateContent xmlns:mc="http://schemas.openxmlformats.org/markup-compatibility/2006">
+              <mc:Choice xmlns:v="urn:schemas-microsoft-com:vml" Requires="v">
+                <p:oleObj name="Document" r:id="rId12" imgW="5940848" imgH="952484" progId="Word.Document.8">
+                  <p:embed/>
+                </p:oleObj>
+              </mc:Choice>
+              <mc:Fallback>
+                <p:oleObj name="Document" r:id="rId12" imgW="5940848" imgH="952484" progId="Word.Document.8">
+                  <p:embed/>
+                  <p:pic>
+                    <p:nvPicPr>
+                      <p:cNvPr id="0" name=""/>
+                      <p:cNvPicPr/>
+                      <p:nvPr/>
+                    </p:nvPicPr>
+                    <p:blipFill>
+                      <a:blip r:embed="rId13"/>
+                      <a:stretch>
+                        <a:fillRect/>
+                      </a:stretch>
+                    </p:blipFill>
+                    <p:spPr>
+                      <a:xfrm>
+                        <a:off x="7620000" y="254000"/>
+                        <a:ext cx="3302000" cy="2032000"/>
                       </a:xfrm>
                       <a:prstGeom prst="rect">
                         <a:avLst/>
